--- a/Lesson_03/Занятие_03_Презентация.pptx
+++ b/Lesson_03/Занятие_03_Презентация.pptx
@@ -11153,7 +11153,51 @@
                 <a:ea typeface="Courier New" pitchFamily="34" charset="-122"/>
                 <a:cs typeface="Courier New" pitchFamily="34" charset="-120"/>
               </a:rPr>
-              <a:t>  &lt;a href="/"&gt;← К форме&lt;/a&gt;</a:t>
+              <a:t>  &lt;a </a:t>
+            </a:r>
+            <a:r>
+              <a:rPr lang="en-US" sz="1600" dirty="0" err="1">
+                <a:solidFill>
+                  <a:srgbClr val="F3F0FF"/>
+                </a:solidFill>
+                <a:latin typeface="Courier New" pitchFamily="34" charset="0"/>
+                <a:ea typeface="Courier New" pitchFamily="34" charset="-122"/>
+                <a:cs typeface="Courier New" pitchFamily="34" charset="-120"/>
+              </a:rPr>
+              <a:t>href</a:t>
+            </a:r>
+            <a:r>
+              <a:rPr lang="en-US" sz="1600" dirty="0">
+                <a:solidFill>
+                  <a:srgbClr val="F3F0FF"/>
+                </a:solidFill>
+                <a:latin typeface="Courier New" pitchFamily="34" charset="0"/>
+                <a:ea typeface="Courier New" pitchFamily="34" charset="-122"/>
+                <a:cs typeface="Courier New" pitchFamily="34" charset="-120"/>
+              </a:rPr>
+              <a:t>="/"&gt;</a:t>
+            </a:r>
+            <a:r>
+              <a:rPr lang="ru-RU" sz="1600" dirty="0">
+                <a:solidFill>
+                  <a:srgbClr val="F3F0FF"/>
+                </a:solidFill>
+                <a:latin typeface="Courier New" pitchFamily="34" charset="0"/>
+                <a:ea typeface="Courier New" pitchFamily="34" charset="-122"/>
+                <a:cs typeface="Courier New" pitchFamily="34" charset="-120"/>
+              </a:rPr>
+              <a:t> </a:t>
+            </a:r>
+            <a:r>
+              <a:rPr lang="en-US" sz="1600" dirty="0">
+                <a:solidFill>
+                  <a:srgbClr val="F3F0FF"/>
+                </a:solidFill>
+                <a:latin typeface="Courier New" pitchFamily="34" charset="0"/>
+                <a:ea typeface="Courier New" pitchFamily="34" charset="-122"/>
+                <a:cs typeface="Courier New" pitchFamily="34" charset="-120"/>
+              </a:rPr>
+              <a:t>К форме&lt;/a&gt;</a:t>
             </a:r>
             <a:endParaRPr lang="en-US" sz="1600" dirty="0"/>
           </a:p>
